--- a/documentos/Poster_ETITC_Desercion_v2.pptx
+++ b/documentos/Poster_ETITC_Desercion_v2.pptx
@@ -8797,8 +8797,8 @@
         </p:nvSpPr>
         <p:spPr>
           <a:xfrm>
-            <a:off x="5212080" y="11859768"/>
-            <a:ext cx="1554480" cy="329184"/>
+            <a:off x="5849332" y="11892296"/>
+            <a:ext cx="902770" cy="192360"/>
           </a:xfrm>
           <a:prstGeom prst="rect">
             <a:avLst/>
@@ -13416,6 +13416,27 @@
 </file>
 
 <file path=customXml/item1.xml><?xml version="1.0" encoding="utf-8"?>
+<p:properties xmlns:p="http://schemas.microsoft.com/office/2006/metadata/properties" xmlns:xsi="http://www.w3.org/2001/XMLSchema-instance" xmlns:pc="http://schemas.microsoft.com/office/infopath/2007/PartnerControls">
+  <documentManagement>
+    <ReferenceId xmlns="1134b229-7533-4e34-b9c5-1ebf7fdd3651" xsi:nil="true"/>
+    <lcf76f155ced4ddcb4097134ff3c332f xmlns="1134b229-7533-4e34-b9c5-1ebf7fdd3651">
+      <Terms xmlns="http://schemas.microsoft.com/office/infopath/2007/PartnerControls"/>
+    </lcf76f155ced4ddcb4097134ff3c332f>
+    <TaxCatchAll xmlns="42a3b858-a068-4efd-92d5-337c04f112a9" xsi:nil="true"/>
+  </documentManagement>
+</p:properties>
+</file>
+
+<file path=customXml/item2.xml><?xml version="1.0" encoding="utf-8"?>
+<?mso-contentType ?>
+<FormTemplates xmlns="http://schemas.microsoft.com/sharepoint/v3/contenttype/forms">
+  <Display>DocumentLibraryForm</Display>
+  <Edit>DocumentLibraryForm</Edit>
+  <New>DocumentLibraryForm</New>
+</FormTemplates>
+</file>
+
+<file path=customXml/item3.xml><?xml version="1.0" encoding="utf-8"?>
 <ct:contentTypeSchema xmlns:ct="http://schemas.microsoft.com/office/2006/metadata/contentType" xmlns:ma="http://schemas.microsoft.com/office/2006/metadata/properties/metaAttributes" ct:_="" ma:_="" ma:contentTypeName="Document" ma:contentTypeID="0x01010034AEE2B78512374397BDEC3F78774FB5" ma:contentTypeVersion="12" ma:contentTypeDescription="Create a new document." ma:contentTypeScope="" ma:versionID="7bac4a21a1c54a7b0e8626f4c24ffad8">
   <xsd:schema xmlns:xsd="http://www.w3.org/2001/XMLSchema" xmlns:xs="http://www.w3.org/2001/XMLSchema" xmlns:p="http://schemas.microsoft.com/office/2006/metadata/properties" xmlns:ns2="1134b229-7533-4e34-b9c5-1ebf7fdd3651" xmlns:ns3="42a3b858-a068-4efd-92d5-337c04f112a9" targetNamespace="http://schemas.microsoft.com/office/2006/metadata/properties" ma:root="true" ma:fieldsID="eb819524a68d031606eb9b4461bfe637" ns2:_="" ns3:_="">
     <xsd:import namespace="1134b229-7533-4e34-b9c5-1ebf7fdd3651"/>
@@ -13616,28 +13637,32 @@
 </ct:contentTypeSchema>
 </file>
 
-<file path=customXml/item2.xml><?xml version="1.0" encoding="utf-8"?>
-<?mso-contentType ?>
-<FormTemplates xmlns="http://schemas.microsoft.com/sharepoint/v3/contenttype/forms">
-  <Display>DocumentLibraryForm</Display>
-  <Edit>DocumentLibraryForm</Edit>
-  <New>DocumentLibraryForm</New>
-</FormTemplates>
+<file path=customXml/itemProps1.xml><?xml version="1.0" encoding="utf-8"?>
+<ds:datastoreItem xmlns:ds="http://schemas.openxmlformats.org/officeDocument/2006/customXml" ds:itemID="{8B9DD82C-CC0E-44C9-8BA4-E47462C869DB}">
+  <ds:schemaRefs>
+    <ds:schemaRef ds:uri="http://www.w3.org/XML/1998/namespace"/>
+    <ds:schemaRef ds:uri="http://schemas.microsoft.com/office/2006/documentManagement/types"/>
+    <ds:schemaRef ds:uri="http://purl.org/dc/elements/1.1/"/>
+    <ds:schemaRef ds:uri="42a3b858-a068-4efd-92d5-337c04f112a9"/>
+    <ds:schemaRef ds:uri="1134b229-7533-4e34-b9c5-1ebf7fdd3651"/>
+    <ds:schemaRef ds:uri="http://purl.org/dc/terms/"/>
+    <ds:schemaRef ds:uri="http://schemas.microsoft.com/office/infopath/2007/PartnerControls"/>
+    <ds:schemaRef ds:uri="http://schemas.openxmlformats.org/package/2006/metadata/core-properties"/>
+    <ds:schemaRef ds:uri="http://schemas.microsoft.com/office/2006/metadata/properties"/>
+    <ds:schemaRef ds:uri="http://purl.org/dc/dcmitype/"/>
+  </ds:schemaRefs>
+</ds:datastoreItem>
 </file>
 
-<file path=customXml/item3.xml><?xml version="1.0" encoding="utf-8"?>
-<p:properties xmlns:p="http://schemas.microsoft.com/office/2006/metadata/properties" xmlns:xsi="http://www.w3.org/2001/XMLSchema-instance" xmlns:pc="http://schemas.microsoft.com/office/infopath/2007/PartnerControls">
-  <documentManagement>
-    <ReferenceId xmlns="1134b229-7533-4e34-b9c5-1ebf7fdd3651" xsi:nil="true"/>
-    <lcf76f155ced4ddcb4097134ff3c332f xmlns="1134b229-7533-4e34-b9c5-1ebf7fdd3651">
-      <Terms xmlns="http://schemas.microsoft.com/office/infopath/2007/PartnerControls"/>
-    </lcf76f155ced4ddcb4097134ff3c332f>
-    <TaxCatchAll xmlns="42a3b858-a068-4efd-92d5-337c04f112a9" xsi:nil="true"/>
-  </documentManagement>
-</p:properties>
+<file path=customXml/itemProps2.xml><?xml version="1.0" encoding="utf-8"?>
+<ds:datastoreItem xmlns:ds="http://schemas.openxmlformats.org/officeDocument/2006/customXml" ds:itemID="{B4650B4D-93EF-42F7-A782-B1FBBBC2419C}">
+  <ds:schemaRefs>
+    <ds:schemaRef ds:uri="http://schemas.microsoft.com/sharepoint/v3/contenttype/forms"/>
+  </ds:schemaRefs>
+</ds:datastoreItem>
 </file>
 
-<file path=customXml/itemProps1.xml><?xml version="1.0" encoding="utf-8"?>
+<file path=customXml/itemProps3.xml><?xml version="1.0" encoding="utf-8"?>
 <ds:datastoreItem xmlns:ds="http://schemas.openxmlformats.org/officeDocument/2006/customXml" ds:itemID="{23548AB9-8E53-4743-A8DE-6779DA88E2E8}">
   <ds:schemaRefs>
     <ds:schemaRef ds:uri="http://schemas.microsoft.com/office/2006/metadata/contentType"/>
@@ -13654,29 +13679,4 @@
     <ds:schemaRef ds:uri="http://schemas.microsoft.com/internal/obd"/>
   </ds:schemaRefs>
 </ds:datastoreItem>
-</file>
-
-<file path=customXml/itemProps2.xml><?xml version="1.0" encoding="utf-8"?>
-<ds:datastoreItem xmlns:ds="http://schemas.openxmlformats.org/officeDocument/2006/customXml" ds:itemID="{B4650B4D-93EF-42F7-A782-B1FBBBC2419C}">
-  <ds:schemaRefs>
-    <ds:schemaRef ds:uri="http://schemas.microsoft.com/sharepoint/v3/contenttype/forms"/>
-  </ds:schemaRefs>
-</ds:datastoreItem>
-</file>
-
-<file path=customXml/itemProps3.xml><?xml version="1.0" encoding="utf-8"?>
-<ds:datastoreItem xmlns:ds="http://schemas.openxmlformats.org/officeDocument/2006/customXml" ds:itemID="{8B9DD82C-CC0E-44C9-8BA4-E47462C869DB}">
-  <ds:schemaRefs>
-    <ds:schemaRef ds:uri="http://www.w3.org/XML/1998/namespace"/>
-    <ds:schemaRef ds:uri="http://schemas.microsoft.com/office/2006/documentManagement/types"/>
-    <ds:schemaRef ds:uri="http://purl.org/dc/elements/1.1/"/>
-    <ds:schemaRef ds:uri="42a3b858-a068-4efd-92d5-337c04f112a9"/>
-    <ds:schemaRef ds:uri="1134b229-7533-4e34-b9c5-1ebf7fdd3651"/>
-    <ds:schemaRef ds:uri="http://purl.org/dc/terms/"/>
-    <ds:schemaRef ds:uri="http://schemas.microsoft.com/office/infopath/2007/PartnerControls"/>
-    <ds:schemaRef ds:uri="http://schemas.openxmlformats.org/package/2006/metadata/core-properties"/>
-    <ds:schemaRef ds:uri="http://schemas.microsoft.com/office/2006/metadata/properties"/>
-    <ds:schemaRef ds:uri="http://purl.org/dc/dcmitype/"/>
-  </ds:schemaRefs>
-</ds:datastoreItem>
 </file>